--- a/slaydlar/M12.pptx
+++ b/slaydlar/M12.pptx
@@ -6629,12 +6629,12 @@
         </p:nvSpPr>
         <p:spPr>
           <a:xfrm>
-            <a:off x="550000" y="1620000"/>
-            <a:ext cx="11100000" cy="1250000"/>
+            <a:off x="550000" y="1409780"/>
+            <a:ext cx="11100000" cy="1503480"/>
           </a:xfrm>
           <a:prstGeom prst="roundRect">
             <a:avLst>
-              <a:gd name="adj" fmla="val 18000"/>
+              <a:gd name="adj" fmla="val 8000"/>
             </a:avLst>
           </a:prstGeom>
           <a:solidFill>
@@ -6675,8 +6675,8 @@
         </p:nvSpPr>
         <p:spPr>
           <a:xfrm>
-            <a:off x="550000" y="1620000"/>
-            <a:ext cx="70000" cy="1250000"/>
+            <a:off x="550000" y="1409780"/>
+            <a:ext cx="70000" cy="1503480"/>
           </a:xfrm>
           <a:prstGeom prst="rect">
             <a:avLst/>
@@ -6719,8 +6719,8 @@
         </p:nvSpPr>
         <p:spPr>
           <a:xfrm>
-            <a:off x="800000" y="2015000"/>
-            <a:ext cx="460000" cy="460000"/>
+            <a:off x="780000" y="1951520"/>
+            <a:ext cx="420000" cy="420000"/>
           </a:xfrm>
           <a:prstGeom prst="ellipse">
             <a:avLst/>
@@ -6753,7 +6753,7 @@
           <a:p>
             <a:pPr algn="ctr"/>
             <a:r>
-              <a:rPr sz="1600" b="1">
+              <a:rPr sz="1400" b="1">
                 <a:solidFill>
                   <a:srgbClr val="FFFFFF"/>
                 </a:solidFill>
@@ -6772,8 +6772,8 @@
         </p:nvSpPr>
         <p:spPr>
           <a:xfrm>
-            <a:off x="1450000" y="1620000"/>
-            <a:ext cx="10050000" cy="1250000"/>
+            <a:off x="1380000" y="1449780"/>
+            <a:ext cx="10150000" cy="1423480"/>
           </a:xfrm>
           <a:prstGeom prst="rect">
             <a:avLst/>
@@ -6781,20 +6781,35 @@
           <a:noFill/>
         </p:spPr>
         <p:txBody>
-          <a:bodyPr wrap="square" anchor="ctr" lIns="50800" rIns="50800">
+          <a:bodyPr wrap="square" anchor="ctr">
             <a:spAutoFit/>
           </a:bodyPr>
           <a:lstStyle/>
           <a:p>
-            <a:pPr algn="l"/>
             <a:r>
-              <a:rPr sz="1600" b="0">
+              <a:rPr sz="1500" b="1">
                 <a:solidFill>
-                  <a:srgbClr val="1B2430"/>
+                  <a:srgbClr val="1F3A5F"/>
                 </a:solidFill>
                 <a:latin typeface="Calibri"/>
               </a:rPr>
-              <a:t>Joylashtirish rejimi ish yukiga qarab tanlanadi. Partiyali inferens (batch): model jadval bo'yicha katta to'plamda bashorat qiladi, natija bazaga yoziladi — tavsiyalar, risk skoringi; eng oddiy, kechikish talabi yo'q, GPU to'liq yuklanadi.</a:t>
+              <a:t>Joylashtirish rejimi ish yukiga qarab tanlanadi.</a:t>
+            </a:r>
+          </a:p>
+          <a:p>
+            <a:pPr>
+              <a:spcBef>
+                <a:spcPts val="400"/>
+              </a:spcBef>
+            </a:pPr>
+            <a:r>
+              <a:rPr sz="1400">
+                <a:solidFill>
+                  <a:srgbClr val="334055"/>
+                </a:solidFill>
+                <a:latin typeface="Calibri"/>
+              </a:rPr>
+              <a:t>Partiyali inferens (batch): model jadval bo'yicha katta to'plamda bashorat qiladi, natija bazaga yoziladi — tavsiyalar, risk skoringi; eng oddiy, kechikish talabi yo'q, GPU to'liq yuklanadi. Onlayn inferens (online, real-time): so'rov–javob API (REST/gRPC), kechikish byudjeti o'nlab millisekund — firibgarlikni aniqlash, qidiruv.</a:t>
             </a:r>
           </a:p>
         </p:txBody>
@@ -6807,12 +6822,12 @@
         </p:nvSpPr>
         <p:spPr>
           <a:xfrm>
-            <a:off x="550000" y="2990000"/>
-            <a:ext cx="11100000" cy="1250000"/>
+            <a:off x="550000" y="3023260"/>
+            <a:ext cx="11100000" cy="1503480"/>
           </a:xfrm>
           <a:prstGeom prst="roundRect">
             <a:avLst>
-              <a:gd name="adj" fmla="val 18000"/>
+              <a:gd name="adj" fmla="val 8000"/>
             </a:avLst>
           </a:prstGeom>
           <a:solidFill>
@@ -6853,8 +6868,8 @@
         </p:nvSpPr>
         <p:spPr>
           <a:xfrm>
-            <a:off x="550000" y="2990000"/>
-            <a:ext cx="70000" cy="1250000"/>
+            <a:off x="550000" y="3023260"/>
+            <a:ext cx="70000" cy="1503480"/>
           </a:xfrm>
           <a:prstGeom prst="rect">
             <a:avLst/>
@@ -6897,8 +6912,8 @@
         </p:nvSpPr>
         <p:spPr>
           <a:xfrm>
-            <a:off x="800000" y="3385000"/>
-            <a:ext cx="460000" cy="460000"/>
+            <a:off x="780000" y="3565000"/>
+            <a:ext cx="420000" cy="420000"/>
           </a:xfrm>
           <a:prstGeom prst="ellipse">
             <a:avLst/>
@@ -6931,7 +6946,7 @@
           <a:p>
             <a:pPr algn="ctr"/>
             <a:r>
-              <a:rPr sz="1600" b="1">
+              <a:rPr sz="1400" b="1">
                 <a:solidFill>
                   <a:srgbClr val="FFFFFF"/>
                 </a:solidFill>
@@ -6950,8 +6965,8 @@
         </p:nvSpPr>
         <p:spPr>
           <a:xfrm>
-            <a:off x="1450000" y="2990000"/>
-            <a:ext cx="10050000" cy="1250000"/>
+            <a:off x="1380000" y="3063260"/>
+            <a:ext cx="10150000" cy="1423480"/>
           </a:xfrm>
           <a:prstGeom prst="rect">
             <a:avLst/>
@@ -6959,14 +6974,13 @@
           <a:noFill/>
         </p:spPr>
         <p:txBody>
-          <a:bodyPr wrap="square" anchor="ctr" lIns="50800" rIns="50800">
+          <a:bodyPr wrap="square" anchor="ctr">
             <a:spAutoFit/>
           </a:bodyPr>
           <a:lstStyle/>
           <a:p>
-            <a:pPr algn="l"/>
             <a:r>
-              <a:rPr sz="1600" b="0">
+              <a:rPr sz="1400" b="0">
                 <a:solidFill>
                   <a:srgbClr val="1B2430"/>
                 </a:solidFill>
@@ -6985,12 +6999,12 @@
         </p:nvSpPr>
         <p:spPr>
           <a:xfrm>
-            <a:off x="550000" y="4360000"/>
-            <a:ext cx="11100000" cy="1250000"/>
+            <a:off x="550000" y="4636740"/>
+            <a:ext cx="11100000" cy="1503480"/>
           </a:xfrm>
           <a:prstGeom prst="roundRect">
             <a:avLst>
-              <a:gd name="adj" fmla="val 18000"/>
+              <a:gd name="adj" fmla="val 8000"/>
             </a:avLst>
           </a:prstGeom>
           <a:solidFill>
@@ -7031,8 +7045,8 @@
         </p:nvSpPr>
         <p:spPr>
           <a:xfrm>
-            <a:off x="550000" y="4360000"/>
-            <a:ext cx="70000" cy="1250000"/>
+            <a:off x="550000" y="4636740"/>
+            <a:ext cx="70000" cy="1503480"/>
           </a:xfrm>
           <a:prstGeom prst="rect">
             <a:avLst/>
@@ -7075,8 +7089,8 @@
         </p:nvSpPr>
         <p:spPr>
           <a:xfrm>
-            <a:off x="800000" y="4755000"/>
-            <a:ext cx="460000" cy="460000"/>
+            <a:off x="780000" y="5178480"/>
+            <a:ext cx="420000" cy="420000"/>
           </a:xfrm>
           <a:prstGeom prst="ellipse">
             <a:avLst/>
@@ -7109,7 +7123,7 @@
           <a:p>
             <a:pPr algn="ctr"/>
             <a:r>
-              <a:rPr sz="1600" b="1">
+              <a:rPr sz="1400" b="1">
                 <a:solidFill>
                   <a:srgbClr val="FFFFFF"/>
                 </a:solidFill>
@@ -7128,8 +7142,8 @@
         </p:nvSpPr>
         <p:spPr>
           <a:xfrm>
-            <a:off x="1450000" y="4360000"/>
-            <a:ext cx="10050000" cy="1250000"/>
+            <a:off x="1380000" y="4676740"/>
+            <a:ext cx="10150000" cy="1423480"/>
           </a:xfrm>
           <a:prstGeom prst="rect">
             <a:avLst/>
@@ -7137,20 +7151,35 @@
           <a:noFill/>
         </p:spPr>
         <p:txBody>
-          <a:bodyPr wrap="square" anchor="ctr" lIns="50800" rIns="50800">
+          <a:bodyPr wrap="square" anchor="ctr">
             <a:spAutoFit/>
           </a:bodyPr>
           <a:lstStyle/>
           <a:p>
-            <a:pPr algn="l"/>
             <a:r>
-              <a:rPr sz="1600" b="0">
+              <a:rPr sz="1500" b="1">
                 <a:solidFill>
-                  <a:srgbClr val="1B2430"/>
+                  <a:srgbClr val="1F3A5F"/>
                 </a:solidFill>
                 <a:latin typeface="Calibri"/>
               </a:rPr>
-              <a:t>Yangi versiyani chiqarish strategiyalari xavfni boshqaradi. Qayta yaratish (recreate): eski to'xtatiladi, yangi ishga tushadi — to'xtash vaqti bor.</a:t>
+              <a:t>Yangi versiyani chiqarish strategiyalari xavfni boshqaradi.</a:t>
+            </a:r>
+          </a:p>
+          <a:p>
+            <a:pPr>
+              <a:spcBef>
+                <a:spcPts val="400"/>
+              </a:spcBef>
+            </a:pPr>
+            <a:r>
+              <a:rPr sz="1400">
+                <a:solidFill>
+                  <a:srgbClr val="334055"/>
+                </a:solidFill>
+                <a:latin typeface="Calibri"/>
+              </a:rPr>
+              <a:t>Qayta yaratish (recreate): eski to'xtatiladi, yangi ishga tushadi — to'xtash vaqti bor. Dumalab yangilash (rolling update): podlar birin-ketin almashtiriladi — Kubernetes standarti, lekin ikki versiya bir vaqtda ishlaydi.</a:t>
             </a:r>
           </a:p>
         </p:txBody>
@@ -9601,12 +9630,12 @@
         </p:nvSpPr>
         <p:spPr>
           <a:xfrm>
-            <a:off x="550000" y="1300000"/>
-            <a:ext cx="11100000" cy="1147500"/>
+            <a:off x="550000" y="1250000"/>
+            <a:ext cx="11100000" cy="1180000"/>
           </a:xfrm>
           <a:prstGeom prst="roundRect">
             <a:avLst>
-              <a:gd name="adj" fmla="val 18000"/>
+              <a:gd name="adj" fmla="val 8000"/>
             </a:avLst>
           </a:prstGeom>
           <a:solidFill>
@@ -9647,8 +9676,8 @@
         </p:nvSpPr>
         <p:spPr>
           <a:xfrm>
-            <a:off x="550000" y="1300000"/>
-            <a:ext cx="70000" cy="1147500"/>
+            <a:off x="550000" y="1250000"/>
+            <a:ext cx="70000" cy="1180000"/>
           </a:xfrm>
           <a:prstGeom prst="rect">
             <a:avLst/>
@@ -9691,8 +9720,8 @@
         </p:nvSpPr>
         <p:spPr>
           <a:xfrm>
-            <a:off x="800000" y="1643750"/>
-            <a:ext cx="460000" cy="460000"/>
+            <a:off x="780000" y="1630000"/>
+            <a:ext cx="420000" cy="420000"/>
           </a:xfrm>
           <a:prstGeom prst="ellipse">
             <a:avLst/>
@@ -9725,7 +9754,7 @@
           <a:p>
             <a:pPr algn="ctr"/>
             <a:r>
-              <a:rPr sz="1600" b="1">
+              <a:rPr sz="1400" b="1">
                 <a:solidFill>
                   <a:srgbClr val="FFFFFF"/>
                 </a:solidFill>
@@ -9744,8 +9773,8 @@
         </p:nvSpPr>
         <p:spPr>
           <a:xfrm>
-            <a:off x="1450000" y="1300000"/>
-            <a:ext cx="10050000" cy="1147500"/>
+            <a:off x="1380000" y="1290000"/>
+            <a:ext cx="10150000" cy="1100000"/>
           </a:xfrm>
           <a:prstGeom prst="rect">
             <a:avLst/>
@@ -9753,22 +9782,37 @@
           <a:noFill/>
         </p:spPr>
         <p:txBody>
-          <a:bodyPr wrap="square" anchor="ctr" lIns="50800" rIns="50800">
+          <a:bodyPr wrap="square" anchor="ctr">
             <a:spAutoFit/>
           </a:bodyPr>
           <a:lstStyle/>
           <a:p>
-            <a:pPr algn="l"/>
             <a:r>
-              <a:rPr sz="1400" b="0">
+              <a:rPr sz="1500" b="1">
                 <a:solidFill>
-                  <a:srgbClr val="1B2430"/>
+                  <a:srgbClr val="1F3A5F"/>
                 </a:solidFill>
                 <a:latin typeface="Calibri"/>
               </a:rPr>
               <a:t>Ishlab chiqarishdagi model uch qatlamda kuzatiladi.</a:t>
             </a:r>
           </a:p>
+          <a:p>
+            <a:pPr>
+              <a:spcBef>
+                <a:spcPts val="400"/>
+              </a:spcBef>
+            </a:pPr>
+            <a:r>
+              <a:rPr sz="1400">
+                <a:solidFill>
+                  <a:srgbClr val="334055"/>
+                </a:solidFill>
+                <a:latin typeface="Calibri"/>
+              </a:rPr>
+              <a:t>Operatsion qatlam — an'anaviy: so'rovlar soni, kechikish foizillari, xato darajasi, GPU bandligi va xotira, navbat uzunligi; vositalar — Prometheus (metrikalar), Grafana (panellar), Alertmanager (ogohlantirish), OpenTelemetry (izlar).</a:t>
+            </a:r>
+          </a:p>
         </p:txBody>
       </p:sp>
       <p:sp>
@@ -9779,12 +9823,12 @@
         </p:nvSpPr>
         <p:spPr>
           <a:xfrm>
-            <a:off x="550000" y="2567500"/>
-            <a:ext cx="11100000" cy="1147500"/>
+            <a:off x="550000" y="2540000"/>
+            <a:ext cx="11100000" cy="1180000"/>
           </a:xfrm>
           <a:prstGeom prst="roundRect">
             <a:avLst>
-              <a:gd name="adj" fmla="val 18000"/>
+              <a:gd name="adj" fmla="val 8000"/>
             </a:avLst>
           </a:prstGeom>
           <a:solidFill>
@@ -9825,8 +9869,8 @@
         </p:nvSpPr>
         <p:spPr>
           <a:xfrm>
-            <a:off x="550000" y="2567500"/>
-            <a:ext cx="70000" cy="1147500"/>
+            <a:off x="550000" y="2540000"/>
+            <a:ext cx="70000" cy="1180000"/>
           </a:xfrm>
           <a:prstGeom prst="rect">
             <a:avLst/>
@@ -9869,8 +9913,8 @@
         </p:nvSpPr>
         <p:spPr>
           <a:xfrm>
-            <a:off x="800000" y="2911250"/>
-            <a:ext cx="460000" cy="460000"/>
+            <a:off x="780000" y="2920000"/>
+            <a:ext cx="420000" cy="420000"/>
           </a:xfrm>
           <a:prstGeom prst="ellipse">
             <a:avLst/>
@@ -9903,7 +9947,7 @@
           <a:p>
             <a:pPr algn="ctr"/>
             <a:r>
-              <a:rPr sz="1600" b="1">
+              <a:rPr sz="1400" b="1">
                 <a:solidFill>
                   <a:srgbClr val="FFFFFF"/>
                 </a:solidFill>
@@ -9922,8 +9966,8 @@
         </p:nvSpPr>
         <p:spPr>
           <a:xfrm>
-            <a:off x="1450000" y="2567500"/>
-            <a:ext cx="10050000" cy="1147500"/>
+            <a:off x="1380000" y="2580000"/>
+            <a:ext cx="10150000" cy="1100000"/>
           </a:xfrm>
           <a:prstGeom prst="rect">
             <a:avLst/>
@@ -9931,20 +9975,35 @@
           <a:noFill/>
         </p:spPr>
         <p:txBody>
-          <a:bodyPr wrap="square" anchor="ctr" lIns="50800" rIns="50800">
+          <a:bodyPr wrap="square" anchor="ctr">
             <a:spAutoFit/>
           </a:bodyPr>
           <a:lstStyle/>
           <a:p>
-            <a:pPr algn="l"/>
             <a:r>
-              <a:rPr sz="1400" b="0">
+              <a:rPr sz="1500" b="1">
                 <a:solidFill>
-                  <a:srgbClr val="1B2430"/>
+                  <a:srgbClr val="1F3A5F"/>
                 </a:solidFill>
                 <a:latin typeface="Calibri"/>
               </a:rPr>
-              <a:t>Siljish (drift) turlari: ma'lumot siljishi (data drift, covariate shift) — kirish taqsimoti P(X) o'zgaradi, bog'liqlik P(Y|X) o'zgarmaydi (yangi mintaqadan foydalanuvchilar); konsepsiya…</a:t>
+              <a:t>Siljish (drift) turlari: ma'lumot siljishi (data drift, covariate shift) — kirish taqsimoti P(X) o'zgaradi, bog'liqlik P(Y|X) o'zgarmaydi (yangi mintaqadan foydalanuvchilar); konsepsiya siljishi (concept drift) — P(Y|X) o'zgaradi (pandemiya iste'mol…</a:t>
+            </a:r>
+          </a:p>
+          <a:p>
+            <a:pPr>
+              <a:spcBef>
+                <a:spcPts val="400"/>
+              </a:spcBef>
+            </a:pPr>
+            <a:r>
+              <a:rPr sz="1400">
+                <a:solidFill>
+                  <a:srgbClr val="334055"/>
+                </a:solidFill>
+                <a:latin typeface="Calibri"/>
+              </a:rPr>
+              <a:t>Siljish keskin (sudden), bosqichma-bosqich (gradual), tiklanuvchi (recurring, mavsumiy) bo'lishi mumkin.</a:t>
             </a:r>
           </a:p>
         </p:txBody>
@@ -9957,12 +10016,12 @@
         </p:nvSpPr>
         <p:spPr>
           <a:xfrm>
-            <a:off x="550000" y="3835000"/>
-            <a:ext cx="11100000" cy="1147500"/>
+            <a:off x="550000" y="3830000"/>
+            <a:ext cx="11100000" cy="1180000"/>
           </a:xfrm>
           <a:prstGeom prst="roundRect">
             <a:avLst>
-              <a:gd name="adj" fmla="val 18000"/>
+              <a:gd name="adj" fmla="val 8000"/>
             </a:avLst>
           </a:prstGeom>
           <a:solidFill>
@@ -10003,8 +10062,8 @@
         </p:nvSpPr>
         <p:spPr>
           <a:xfrm>
-            <a:off x="550000" y="3835000"/>
-            <a:ext cx="70000" cy="1147500"/>
+            <a:off x="550000" y="3830000"/>
+            <a:ext cx="70000" cy="1180000"/>
           </a:xfrm>
           <a:prstGeom prst="rect">
             <a:avLst/>
@@ -10047,8 +10106,8 @@
         </p:nvSpPr>
         <p:spPr>
           <a:xfrm>
-            <a:off x="800000" y="4178750"/>
-            <a:ext cx="460000" cy="460000"/>
+            <a:off x="780000" y="4210000"/>
+            <a:ext cx="420000" cy="420000"/>
           </a:xfrm>
           <a:prstGeom prst="ellipse">
             <a:avLst/>
@@ -10081,7 +10140,7 @@
           <a:p>
             <a:pPr algn="ctr"/>
             <a:r>
-              <a:rPr sz="1600" b="1">
+              <a:rPr sz="1400" b="1">
                 <a:solidFill>
                   <a:srgbClr val="FFFFFF"/>
                 </a:solidFill>
@@ -10100,8 +10159,8 @@
         </p:nvSpPr>
         <p:spPr>
           <a:xfrm>
-            <a:off x="1450000" y="3835000"/>
-            <a:ext cx="10050000" cy="1147500"/>
+            <a:off x="1380000" y="3870000"/>
+            <a:ext cx="10150000" cy="1100000"/>
           </a:xfrm>
           <a:prstGeom prst="rect">
             <a:avLst/>
@@ -10109,12 +10168,11 @@
           <a:noFill/>
         </p:spPr>
         <p:txBody>
-          <a:bodyPr wrap="square" anchor="ctr" lIns="50800" rIns="50800">
+          <a:bodyPr wrap="square" anchor="ctr">
             <a:spAutoFit/>
           </a:bodyPr>
           <a:lstStyle/>
           <a:p>
-            <a:pPr algn="l"/>
             <a:r>
               <a:rPr sz="1400" b="0">
                 <a:solidFill>
@@ -10135,12 +10193,12 @@
         </p:nvSpPr>
         <p:spPr>
           <a:xfrm>
-            <a:off x="550000" y="5102500"/>
-            <a:ext cx="11100000" cy="1147500"/>
+            <a:off x="550000" y="5120000"/>
+            <a:ext cx="11100000" cy="1180000"/>
           </a:xfrm>
           <a:prstGeom prst="roundRect">
             <a:avLst>
-              <a:gd name="adj" fmla="val 18000"/>
+              <a:gd name="adj" fmla="val 8000"/>
             </a:avLst>
           </a:prstGeom>
           <a:solidFill>
@@ -10181,8 +10239,8 @@
         </p:nvSpPr>
         <p:spPr>
           <a:xfrm>
-            <a:off x="550000" y="5102500"/>
-            <a:ext cx="70000" cy="1147500"/>
+            <a:off x="550000" y="5120000"/>
+            <a:ext cx="70000" cy="1180000"/>
           </a:xfrm>
           <a:prstGeom prst="rect">
             <a:avLst/>
@@ -10225,8 +10283,8 @@
         </p:nvSpPr>
         <p:spPr>
           <a:xfrm>
-            <a:off x="800000" y="5446250"/>
-            <a:ext cx="460000" cy="460000"/>
+            <a:off x="780000" y="5500000"/>
+            <a:ext cx="420000" cy="420000"/>
           </a:xfrm>
           <a:prstGeom prst="ellipse">
             <a:avLst/>
@@ -10259,7 +10317,7 @@
           <a:p>
             <a:pPr algn="ctr"/>
             <a:r>
-              <a:rPr sz="1600" b="1">
+              <a:rPr sz="1400" b="1">
                 <a:solidFill>
                   <a:srgbClr val="FFFFFF"/>
                 </a:solidFill>
@@ -10278,8 +10336,8 @@
         </p:nvSpPr>
         <p:spPr>
           <a:xfrm>
-            <a:off x="1450000" y="5102500"/>
-            <a:ext cx="10050000" cy="1147500"/>
+            <a:off x="1380000" y="5160000"/>
+            <a:ext cx="10150000" cy="1100000"/>
           </a:xfrm>
           <a:prstGeom prst="rect">
             <a:avLst/>
@@ -10287,12 +10345,11 @@
           <a:noFill/>
         </p:spPr>
         <p:txBody>
-          <a:bodyPr wrap="square" anchor="ctr" lIns="50800" rIns="50800">
+          <a:bodyPr wrap="square" anchor="ctr">
             <a:spAutoFit/>
           </a:bodyPr>
           <a:lstStyle/>
           <a:p>
-            <a:pPr algn="l"/>
             <a:r>
               <a:rPr sz="1400" b="0">
                 <a:solidFill>
@@ -10300,7 +10357,7 @@
                 </a:solidFill>
                 <a:latin typeface="Calibri"/>
               </a:rPr>
-              <a:t>Siljish aniqlangach nima qilish kerak — bu ham loyihalash qarori: ogohlantirish va inson tahlili; avtomatik qayta o'qitish (CT trigger); zaxira modelga yoki qoidaga o'tish; bashoratga…</a:t>
+              <a:t>Siljish aniqlangach nima qilish kerak — bu ham loyihalash qarori: ogohlantirish va inson tahlili; avtomatik qayta o'qitish (CT trigger); zaxira modelga yoki qoidaga o'tish; bashoratga ishonchsizlik belgisi qo'yish.</a:t>
             </a:r>
           </a:p>
         </p:txBody>
@@ -13115,12 +13172,12 @@
         </p:nvSpPr>
         <p:spPr>
           <a:xfrm>
-            <a:off x="550000" y="2533333"/>
-            <a:ext cx="11100000" cy="1250000"/>
+            <a:off x="550000" y="2897530"/>
+            <a:ext cx="11100000" cy="1754940"/>
           </a:xfrm>
           <a:prstGeom prst="roundRect">
             <a:avLst>
-              <a:gd name="adj" fmla="val 18000"/>
+              <a:gd name="adj" fmla="val 8000"/>
             </a:avLst>
           </a:prstGeom>
           <a:solidFill>
@@ -13161,8 +13218,8 @@
         </p:nvSpPr>
         <p:spPr>
           <a:xfrm>
-            <a:off x="550000" y="2533333"/>
-            <a:ext cx="70000" cy="1250000"/>
+            <a:off x="550000" y="2897530"/>
+            <a:ext cx="70000" cy="1754940"/>
           </a:xfrm>
           <a:prstGeom prst="rect">
             <a:avLst/>
@@ -13205,8 +13262,8 @@
         </p:nvSpPr>
         <p:spPr>
           <a:xfrm>
-            <a:off x="800000" y="2928333"/>
-            <a:ext cx="460000" cy="460000"/>
+            <a:off x="780000" y="3565000"/>
+            <a:ext cx="420000" cy="420000"/>
           </a:xfrm>
           <a:prstGeom prst="ellipse">
             <a:avLst/>
@@ -13239,7 +13296,7 @@
           <a:p>
             <a:pPr algn="ctr"/>
             <a:r>
-              <a:rPr sz="1600" b="1">
+              <a:rPr sz="1400" b="1">
                 <a:solidFill>
                   <a:srgbClr val="FFFFFF"/>
                 </a:solidFill>
@@ -13258,8 +13315,8 @@
         </p:nvSpPr>
         <p:spPr>
           <a:xfrm>
-            <a:off x="1450000" y="2533333"/>
-            <a:ext cx="10050000" cy="1250000"/>
+            <a:off x="1380000" y="2937530"/>
+            <a:ext cx="10150000" cy="1674940"/>
           </a:xfrm>
           <a:prstGeom prst="rect">
             <a:avLst/>
@@ -13267,20 +13324,35 @@
           <a:noFill/>
         </p:spPr>
         <p:txBody>
-          <a:bodyPr wrap="square" anchor="ctr" lIns="50800" rIns="50800">
+          <a:bodyPr wrap="square" anchor="ctr">
             <a:spAutoFit/>
           </a:bodyPr>
           <a:lstStyle/>
           <a:p>
-            <a:pPr algn="l"/>
             <a:r>
-              <a:rPr sz="1600" b="0">
+              <a:rPr sz="1800" b="1">
                 <a:solidFill>
-                  <a:srgbClr val="1B2430"/>
+                  <a:srgbClr val="1F3A5F"/>
                 </a:solidFill>
                 <a:latin typeface="Calibri"/>
               </a:rPr>
-              <a:t>AI infratuzilmasi — GPU tugunlari, klaster, saqlash, tarmoq, reestr, monitoring — ham kod sifatida boshqarilishi kerak (Infrastructure as Code, IaC). Terraform yoki Pulumi bulut resurslarini (GPU instanslar, Kubernetes klaster, obyekt saqlash, IAM rollari)…</a:t>
+              <a:t>AI infratuzilmasi — GPU tugunlari, klaster, saqlash, tarmoq, reestr, monitoring — ham kod sifatida boshqarilishi kerak (Infrastructure as Code, IaC).</a:t>
+            </a:r>
+          </a:p>
+          <a:p>
+            <a:pPr>
+              <a:spcBef>
+                <a:spcPts val="400"/>
+              </a:spcBef>
+            </a:pPr>
+            <a:r>
+              <a:rPr sz="1700">
+                <a:solidFill>
+                  <a:srgbClr val="334055"/>
+                </a:solidFill>
+                <a:latin typeface="Calibri"/>
+              </a:rPr>
+              <a:t>Terraform yoki Pulumi bulut resurslarini (GPU instanslar, Kubernetes klaster, obyekt saqlash, IAM rollari) deklarativ fayllarda tavsiflaydi va plan/apply bilan takrorlanuvchan yaratadi; Ansible — serverlarni sozlash.</a:t>
             </a:r>
           </a:p>
         </p:txBody>
@@ -14675,8 +14747,8 @@
         </p:nvSpPr>
         <p:spPr>
           <a:xfrm>
-            <a:off x="550000" y="1300000"/>
-            <a:ext cx="11100000" cy="725000"/>
+            <a:off x="550000" y="1940000"/>
+            <a:ext cx="11100000" cy="520000"/>
           </a:xfrm>
           <a:prstGeom prst="roundRect">
             <a:avLst>
@@ -14721,8 +14793,8 @@
         </p:nvSpPr>
         <p:spPr>
           <a:xfrm>
-            <a:off x="550000" y="1300000"/>
-            <a:ext cx="70000" cy="725000"/>
+            <a:off x="550000" y="1940000"/>
+            <a:ext cx="70000" cy="520000"/>
           </a:xfrm>
           <a:prstGeom prst="rect">
             <a:avLst/>
@@ -14765,8 +14837,8 @@
         </p:nvSpPr>
         <p:spPr>
           <a:xfrm>
-            <a:off x="800000" y="1432500"/>
-            <a:ext cx="460000" cy="460000"/>
+            <a:off x="780000" y="2010000"/>
+            <a:ext cx="380000" cy="380000"/>
           </a:xfrm>
           <a:prstGeom prst="ellipse">
             <a:avLst/>
@@ -14799,7 +14871,7 @@
           <a:p>
             <a:pPr algn="ctr"/>
             <a:r>
-              <a:rPr sz="1600" b="1">
+              <a:rPr sz="1400" b="1">
                 <a:solidFill>
                   <a:srgbClr val="FFFFFF"/>
                 </a:solidFill>
@@ -14818,8 +14890,8 @@
         </p:nvSpPr>
         <p:spPr>
           <a:xfrm>
-            <a:off x="1450000" y="1300000"/>
-            <a:ext cx="10050000" cy="725000"/>
+            <a:off x="1380000" y="1980000"/>
+            <a:ext cx="10150000" cy="440000"/>
           </a:xfrm>
           <a:prstGeom prst="rect">
             <a:avLst/>
@@ -14827,14 +14899,13 @@
           <a:noFill/>
         </p:spPr>
         <p:txBody>
-          <a:bodyPr wrap="square" anchor="ctr" lIns="50800" rIns="50800">
+          <a:bodyPr wrap="square" anchor="ctr">
             <a:spAutoFit/>
           </a:bodyPr>
           <a:lstStyle/>
           <a:p>
-            <a:pPr algn="l"/>
             <a:r>
-              <a:rPr sz="1900" b="0">
+              <a:rPr sz="1600" b="0">
                 <a:solidFill>
                   <a:srgbClr val="1B2430"/>
                 </a:solidFill>
@@ -14853,8 +14924,8 @@
         </p:nvSpPr>
         <p:spPr>
           <a:xfrm>
-            <a:off x="550000" y="2145000"/>
-            <a:ext cx="11100000" cy="725000"/>
+            <a:off x="550000" y="2570000"/>
+            <a:ext cx="11100000" cy="520000"/>
           </a:xfrm>
           <a:prstGeom prst="roundRect">
             <a:avLst>
@@ -14899,8 +14970,8 @@
         </p:nvSpPr>
         <p:spPr>
           <a:xfrm>
-            <a:off x="550000" y="2145000"/>
-            <a:ext cx="70000" cy="725000"/>
+            <a:off x="550000" y="2570000"/>
+            <a:ext cx="70000" cy="520000"/>
           </a:xfrm>
           <a:prstGeom prst="rect">
             <a:avLst/>
@@ -14943,8 +15014,8 @@
         </p:nvSpPr>
         <p:spPr>
           <a:xfrm>
-            <a:off x="800000" y="2277500"/>
-            <a:ext cx="460000" cy="460000"/>
+            <a:off x="780000" y="2640000"/>
+            <a:ext cx="380000" cy="380000"/>
           </a:xfrm>
           <a:prstGeom prst="ellipse">
             <a:avLst/>
@@ -14977,7 +15048,7 @@
           <a:p>
             <a:pPr algn="ctr"/>
             <a:r>
-              <a:rPr sz="1600" b="1">
+              <a:rPr sz="1400" b="1">
                 <a:solidFill>
                   <a:srgbClr val="FFFFFF"/>
                 </a:solidFill>
@@ -14996,8 +15067,8 @@
         </p:nvSpPr>
         <p:spPr>
           <a:xfrm>
-            <a:off x="1450000" y="2145000"/>
-            <a:ext cx="10050000" cy="725000"/>
+            <a:off x="1380000" y="2610000"/>
+            <a:ext cx="10150000" cy="440000"/>
           </a:xfrm>
           <a:prstGeom prst="rect">
             <a:avLst/>
@@ -15005,14 +15076,13 @@
           <a:noFill/>
         </p:spPr>
         <p:txBody>
-          <a:bodyPr wrap="square" anchor="ctr" lIns="50800" rIns="50800">
+          <a:bodyPr wrap="square" anchor="ctr">
             <a:spAutoFit/>
           </a:bodyPr>
           <a:lstStyle/>
           <a:p>
-            <a:pPr algn="l"/>
             <a:r>
-              <a:rPr sz="1900" b="0">
+              <a:rPr sz="1600" b="0">
                 <a:solidFill>
                   <a:srgbClr val="1B2430"/>
                 </a:solidFill>
@@ -15031,8 +15101,8 @@
         </p:nvSpPr>
         <p:spPr>
           <a:xfrm>
-            <a:off x="550000" y="2990000"/>
-            <a:ext cx="11100000" cy="725000"/>
+            <a:off x="550000" y="3200000"/>
+            <a:ext cx="11100000" cy="520000"/>
           </a:xfrm>
           <a:prstGeom prst="roundRect">
             <a:avLst>
@@ -15077,8 +15147,8 @@
         </p:nvSpPr>
         <p:spPr>
           <a:xfrm>
-            <a:off x="550000" y="2990000"/>
-            <a:ext cx="70000" cy="725000"/>
+            <a:off x="550000" y="3200000"/>
+            <a:ext cx="70000" cy="520000"/>
           </a:xfrm>
           <a:prstGeom prst="rect">
             <a:avLst/>
@@ -15121,8 +15191,8 @@
         </p:nvSpPr>
         <p:spPr>
           <a:xfrm>
-            <a:off x="800000" y="3122500"/>
-            <a:ext cx="460000" cy="460000"/>
+            <a:off x="780000" y="3270000"/>
+            <a:ext cx="380000" cy="380000"/>
           </a:xfrm>
           <a:prstGeom prst="ellipse">
             <a:avLst/>
@@ -15155,7 +15225,7 @@
           <a:p>
             <a:pPr algn="ctr"/>
             <a:r>
-              <a:rPr sz="1600" b="1">
+              <a:rPr sz="1400" b="1">
                 <a:solidFill>
                   <a:srgbClr val="FFFFFF"/>
                 </a:solidFill>
@@ -15174,8 +15244,8 @@
         </p:nvSpPr>
         <p:spPr>
           <a:xfrm>
-            <a:off x="1450000" y="2990000"/>
-            <a:ext cx="10050000" cy="725000"/>
+            <a:off x="1380000" y="3240000"/>
+            <a:ext cx="10150000" cy="440000"/>
           </a:xfrm>
           <a:prstGeom prst="rect">
             <a:avLst/>
@@ -15183,14 +15253,13 @@
           <a:noFill/>
         </p:spPr>
         <p:txBody>
-          <a:bodyPr wrap="square" anchor="ctr" lIns="50800" rIns="50800">
+          <a:bodyPr wrap="square" anchor="ctr">
             <a:spAutoFit/>
           </a:bodyPr>
           <a:lstStyle/>
           <a:p>
-            <a:pPr algn="l"/>
             <a:r>
-              <a:rPr sz="1900" b="0">
+              <a:rPr sz="1600" b="0">
                 <a:solidFill>
                   <a:srgbClr val="1B2430"/>
                 </a:solidFill>
@@ -15209,8 +15278,8 @@
         </p:nvSpPr>
         <p:spPr>
           <a:xfrm>
-            <a:off x="550000" y="3835000"/>
-            <a:ext cx="11100000" cy="725000"/>
+            <a:off x="550000" y="3830000"/>
+            <a:ext cx="11100000" cy="520000"/>
           </a:xfrm>
           <a:prstGeom prst="roundRect">
             <a:avLst>
@@ -15255,8 +15324,8 @@
         </p:nvSpPr>
         <p:spPr>
           <a:xfrm>
-            <a:off x="550000" y="3835000"/>
-            <a:ext cx="70000" cy="725000"/>
+            <a:off x="550000" y="3830000"/>
+            <a:ext cx="70000" cy="520000"/>
           </a:xfrm>
           <a:prstGeom prst="rect">
             <a:avLst/>
@@ -15299,8 +15368,8 @@
         </p:nvSpPr>
         <p:spPr>
           <a:xfrm>
-            <a:off x="800000" y="3967500"/>
-            <a:ext cx="460000" cy="460000"/>
+            <a:off x="780000" y="3900000"/>
+            <a:ext cx="380000" cy="380000"/>
           </a:xfrm>
           <a:prstGeom prst="ellipse">
             <a:avLst/>
@@ -15333,7 +15402,7 @@
           <a:p>
             <a:pPr algn="ctr"/>
             <a:r>
-              <a:rPr sz="1600" b="1">
+              <a:rPr sz="1400" b="1">
                 <a:solidFill>
                   <a:srgbClr val="FFFFFF"/>
                 </a:solidFill>
@@ -15352,8 +15421,8 @@
         </p:nvSpPr>
         <p:spPr>
           <a:xfrm>
-            <a:off x="1450000" y="3835000"/>
-            <a:ext cx="10050000" cy="725000"/>
+            <a:off x="1380000" y="3870000"/>
+            <a:ext cx="10150000" cy="440000"/>
           </a:xfrm>
           <a:prstGeom prst="rect">
             <a:avLst/>
@@ -15361,14 +15430,13 @@
           <a:noFill/>
         </p:spPr>
         <p:txBody>
-          <a:bodyPr wrap="square" anchor="ctr" lIns="50800" rIns="50800">
+          <a:bodyPr wrap="square" anchor="ctr">
             <a:spAutoFit/>
           </a:bodyPr>
           <a:lstStyle/>
           <a:p>
-            <a:pPr algn="l"/>
             <a:r>
-              <a:rPr sz="1900" b="0">
+              <a:rPr sz="1600" b="0">
                 <a:solidFill>
                   <a:srgbClr val="1B2430"/>
                 </a:solidFill>
@@ -15387,8 +15455,8 @@
         </p:nvSpPr>
         <p:spPr>
           <a:xfrm>
-            <a:off x="550000" y="4680000"/>
-            <a:ext cx="11100000" cy="725000"/>
+            <a:off x="550000" y="4460000"/>
+            <a:ext cx="11100000" cy="520000"/>
           </a:xfrm>
           <a:prstGeom prst="roundRect">
             <a:avLst>
@@ -15433,8 +15501,8 @@
         </p:nvSpPr>
         <p:spPr>
           <a:xfrm>
-            <a:off x="550000" y="4680000"/>
-            <a:ext cx="70000" cy="725000"/>
+            <a:off x="550000" y="4460000"/>
+            <a:ext cx="70000" cy="520000"/>
           </a:xfrm>
           <a:prstGeom prst="rect">
             <a:avLst/>
@@ -15477,8 +15545,8 @@
         </p:nvSpPr>
         <p:spPr>
           <a:xfrm>
-            <a:off x="800000" y="4812500"/>
-            <a:ext cx="460000" cy="460000"/>
+            <a:off x="780000" y="4530000"/>
+            <a:ext cx="380000" cy="380000"/>
           </a:xfrm>
           <a:prstGeom prst="ellipse">
             <a:avLst/>
@@ -15511,7 +15579,7 @@
           <a:p>
             <a:pPr algn="ctr"/>
             <a:r>
-              <a:rPr sz="1600" b="1">
+              <a:rPr sz="1400" b="1">
                 <a:solidFill>
                   <a:srgbClr val="FFFFFF"/>
                 </a:solidFill>
@@ -15530,8 +15598,8 @@
         </p:nvSpPr>
         <p:spPr>
           <a:xfrm>
-            <a:off x="1450000" y="4680000"/>
-            <a:ext cx="10050000" cy="725000"/>
+            <a:off x="1380000" y="4500000"/>
+            <a:ext cx="10150000" cy="440000"/>
           </a:xfrm>
           <a:prstGeom prst="rect">
             <a:avLst/>
@@ -15539,14 +15607,13 @@
           <a:noFill/>
         </p:spPr>
         <p:txBody>
-          <a:bodyPr wrap="square" anchor="ctr" lIns="50800" rIns="50800">
+          <a:bodyPr wrap="square" anchor="ctr">
             <a:spAutoFit/>
           </a:bodyPr>
           <a:lstStyle/>
           <a:p>
-            <a:pPr algn="l"/>
             <a:r>
-              <a:rPr sz="1900" b="0">
+              <a:rPr sz="1600" b="0">
                 <a:solidFill>
                   <a:srgbClr val="1B2430"/>
                 </a:solidFill>
@@ -15565,8 +15632,8 @@
         </p:nvSpPr>
         <p:spPr>
           <a:xfrm>
-            <a:off x="550000" y="5525000"/>
-            <a:ext cx="11100000" cy="725000"/>
+            <a:off x="550000" y="5090000"/>
+            <a:ext cx="11100000" cy="520000"/>
           </a:xfrm>
           <a:prstGeom prst="roundRect">
             <a:avLst>
@@ -15611,8 +15678,8 @@
         </p:nvSpPr>
         <p:spPr>
           <a:xfrm>
-            <a:off x="550000" y="5525000"/>
-            <a:ext cx="70000" cy="725000"/>
+            <a:off x="550000" y="5090000"/>
+            <a:ext cx="70000" cy="520000"/>
           </a:xfrm>
           <a:prstGeom prst="rect">
             <a:avLst/>
@@ -15655,8 +15722,8 @@
         </p:nvSpPr>
         <p:spPr>
           <a:xfrm>
-            <a:off x="800000" y="5657500"/>
-            <a:ext cx="460000" cy="460000"/>
+            <a:off x="780000" y="5160000"/>
+            <a:ext cx="380000" cy="380000"/>
           </a:xfrm>
           <a:prstGeom prst="ellipse">
             <a:avLst/>
@@ -15689,7 +15756,7 @@
           <a:p>
             <a:pPr algn="ctr"/>
             <a:r>
-              <a:rPr sz="1600" b="1">
+              <a:rPr sz="1400" b="1">
                 <a:solidFill>
                   <a:srgbClr val="FFFFFF"/>
                 </a:solidFill>
@@ -15708,8 +15775,8 @@
         </p:nvSpPr>
         <p:spPr>
           <a:xfrm>
-            <a:off x="1450000" y="5525000"/>
-            <a:ext cx="10050000" cy="725000"/>
+            <a:off x="1380000" y="5130000"/>
+            <a:ext cx="10150000" cy="440000"/>
           </a:xfrm>
           <a:prstGeom prst="rect">
             <a:avLst/>
@@ -15717,14 +15784,13 @@
           <a:noFill/>
         </p:spPr>
         <p:txBody>
-          <a:bodyPr wrap="square" anchor="ctr" lIns="50800" rIns="50800">
+          <a:bodyPr wrap="square" anchor="ctr">
             <a:spAutoFit/>
           </a:bodyPr>
           <a:lstStyle/>
           <a:p>
-            <a:pPr algn="l"/>
             <a:r>
-              <a:rPr sz="1900" b="0">
+              <a:rPr sz="1600" b="0">
                 <a:solidFill>
                   <a:srgbClr val="1B2430"/>
                 </a:solidFill>
@@ -19273,12 +19339,12 @@
         </p:nvSpPr>
         <p:spPr>
           <a:xfrm>
-            <a:off x="550000" y="2076666"/>
-            <a:ext cx="11100000" cy="1250000"/>
+            <a:off x="550000" y="2250048"/>
+            <a:ext cx="11100000" cy="1469952"/>
           </a:xfrm>
           <a:prstGeom prst="roundRect">
             <a:avLst>
-              <a:gd name="adj" fmla="val 18000"/>
+              <a:gd name="adj" fmla="val 8000"/>
             </a:avLst>
           </a:prstGeom>
           <a:solidFill>
@@ -19319,8 +19385,8 @@
         </p:nvSpPr>
         <p:spPr>
           <a:xfrm>
-            <a:off x="550000" y="2076666"/>
-            <a:ext cx="70000" cy="1250000"/>
+            <a:off x="550000" y="2250048"/>
+            <a:ext cx="70000" cy="1469952"/>
           </a:xfrm>
           <a:prstGeom prst="rect">
             <a:avLst/>
@@ -19363,8 +19429,8 @@
         </p:nvSpPr>
         <p:spPr>
           <a:xfrm>
-            <a:off x="800000" y="2471666"/>
-            <a:ext cx="460000" cy="460000"/>
+            <a:off x="780000" y="2775024"/>
+            <a:ext cx="420000" cy="420000"/>
           </a:xfrm>
           <a:prstGeom prst="ellipse">
             <a:avLst/>
@@ -19397,7 +19463,7 @@
           <a:p>
             <a:pPr algn="ctr"/>
             <a:r>
-              <a:rPr sz="1600" b="1">
+              <a:rPr sz="1400" b="1">
                 <a:solidFill>
                   <a:srgbClr val="FFFFFF"/>
                 </a:solidFill>
@@ -19416,8 +19482,8 @@
         </p:nvSpPr>
         <p:spPr>
           <a:xfrm>
-            <a:off x="1450000" y="2076666"/>
-            <a:ext cx="10050000" cy="1250000"/>
+            <a:off x="1380000" y="2290048"/>
+            <a:ext cx="10150000" cy="1389952"/>
           </a:xfrm>
           <a:prstGeom prst="rect">
             <a:avLst/>
@@ -19425,20 +19491,19 @@
           <a:noFill/>
         </p:spPr>
         <p:txBody>
-          <a:bodyPr wrap="square" anchor="ctr" lIns="50800" rIns="50800">
+          <a:bodyPr wrap="square" anchor="ctr">
             <a:spAutoFit/>
           </a:bodyPr>
           <a:lstStyle/>
           <a:p>
-            <a:pPr algn="l"/>
             <a:r>
-              <a:rPr sz="1600" b="0">
+              <a:rPr sz="1700" b="0">
                 <a:solidFill>
                   <a:srgbClr val="1B2430"/>
                 </a:solidFill>
                 <a:latin typeface="Calibri"/>
               </a:rPr>
-              <a:t>MLOps — ML tizimlarini ishlab chiqish (Dev) va ekspluatatsiya qilish (Ops) o'rtasidagi devorni yo'qotuvchi, avtomatlashtirish, monitoring va hamkorlikka asoslangan amaliyotlar to'plami. Uning asosiy tamoyillari: hamma narsa versiyalanadi (kod, ma'lumot,…</a:t>
+              <a:t>MLOps — ML tizimlarini ishlab chiqish (Dev) va ekspluatatsiya qilish (Ops) o'rtasidagi devorni yo'qotuvchi, avtomatlashtirish, monitoring va hamkorlikka asoslangan amaliyotlar to'plami.</a:t>
             </a:r>
           </a:p>
         </p:txBody>
@@ -19451,12 +19516,12 @@
         </p:nvSpPr>
         <p:spPr>
           <a:xfrm>
-            <a:off x="550000" y="3446666"/>
-            <a:ext cx="11100000" cy="1250000"/>
+            <a:off x="550000" y="3830000"/>
+            <a:ext cx="11100000" cy="1469952"/>
           </a:xfrm>
           <a:prstGeom prst="roundRect">
             <a:avLst>
-              <a:gd name="adj" fmla="val 18000"/>
+              <a:gd name="adj" fmla="val 8000"/>
             </a:avLst>
           </a:prstGeom>
           <a:solidFill>
@@ -19497,8 +19562,8 @@
         </p:nvSpPr>
         <p:spPr>
           <a:xfrm>
-            <a:off x="550000" y="3446666"/>
-            <a:ext cx="70000" cy="1250000"/>
+            <a:off x="550000" y="3830000"/>
+            <a:ext cx="70000" cy="1469952"/>
           </a:xfrm>
           <a:prstGeom prst="rect">
             <a:avLst/>
@@ -19541,8 +19606,8 @@
         </p:nvSpPr>
         <p:spPr>
           <a:xfrm>
-            <a:off x="800000" y="3841666"/>
-            <a:ext cx="460000" cy="460000"/>
+            <a:off x="780000" y="4354976"/>
+            <a:ext cx="420000" cy="420000"/>
           </a:xfrm>
           <a:prstGeom prst="ellipse">
             <a:avLst/>
@@ -19575,7 +19640,7 @@
           <a:p>
             <a:pPr algn="ctr"/>
             <a:r>
-              <a:rPr sz="1600" b="1">
+              <a:rPr sz="1400" b="1">
                 <a:solidFill>
                   <a:srgbClr val="FFFFFF"/>
                 </a:solidFill>
@@ -19594,8 +19659,8 @@
         </p:nvSpPr>
         <p:spPr>
           <a:xfrm>
-            <a:off x="1450000" y="3446666"/>
-            <a:ext cx="10050000" cy="1250000"/>
+            <a:off x="1380000" y="3870000"/>
+            <a:ext cx="10150000" cy="1389952"/>
           </a:xfrm>
           <a:prstGeom prst="rect">
             <a:avLst/>
@@ -19603,20 +19668,35 @@
           <a:noFill/>
         </p:spPr>
         <p:txBody>
-          <a:bodyPr wrap="square" anchor="ctr" lIns="50800" rIns="50800">
+          <a:bodyPr wrap="square" anchor="ctr">
             <a:spAutoFit/>
           </a:bodyPr>
           <a:lstStyle/>
           <a:p>
-            <a:pPr algn="l"/>
             <a:r>
-              <a:rPr sz="1600" b="0">
+              <a:rPr sz="1800" b="1">
                 <a:solidFill>
-                  <a:srgbClr val="1B2430"/>
+                  <a:srgbClr val="1F3A5F"/>
                 </a:solidFill>
                 <a:latin typeface="Calibri"/>
               </a:rPr>
-              <a:t>Google Cloud'ning keng tarqalgan tasnifi uch yetuklik darajasini ajratadi. 0-daraja — qo'lda jarayon: ma'lumotlar olimi daftarda model o'qitadi, og'irliklar faylini muhandisga beradi, u qo'lda joylashtiradi; o'qitish va joylashtirish o'rtasida haftalar,…</a:t>
+              <a:t>Google Cloud'ning keng tarqalgan tasnifi uch yetuklik darajasini ajratadi.</a:t>
+            </a:r>
+          </a:p>
+          <a:p>
+            <a:pPr>
+              <a:spcBef>
+                <a:spcPts val="400"/>
+              </a:spcBef>
+            </a:pPr>
+            <a:r>
+              <a:rPr sz="1700">
+                <a:solidFill>
+                  <a:srgbClr val="334055"/>
+                </a:solidFill>
+                <a:latin typeface="Calibri"/>
+              </a:rPr>
+              <a:t>0-daraja — qo'lda jarayon: ma'lumotlar olimi daftarda model o'qitadi, og'irliklar faylini muhandisga beradi, u qo'lda joylashtiradi; o'qitish va joylashtirish o'rtasida haftalar, monitoring yo'q, model tez eskiradi.</a:t>
             </a:r>
           </a:p>
         </p:txBody>
@@ -22684,12 +22764,12 @@
         </p:nvSpPr>
         <p:spPr>
           <a:xfrm>
-            <a:off x="550000" y="1620000"/>
-            <a:ext cx="11100000" cy="1250000"/>
+            <a:off x="550000" y="1409780"/>
+            <a:ext cx="11100000" cy="1503480"/>
           </a:xfrm>
           <a:prstGeom prst="roundRect">
             <a:avLst>
-              <a:gd name="adj" fmla="val 18000"/>
+              <a:gd name="adj" fmla="val 8000"/>
             </a:avLst>
           </a:prstGeom>
           <a:solidFill>
@@ -22730,8 +22810,8 @@
         </p:nvSpPr>
         <p:spPr>
           <a:xfrm>
-            <a:off x="550000" y="1620000"/>
-            <a:ext cx="70000" cy="1250000"/>
+            <a:off x="550000" y="1409780"/>
+            <a:ext cx="70000" cy="1503480"/>
           </a:xfrm>
           <a:prstGeom prst="rect">
             <a:avLst/>
@@ -22774,8 +22854,8 @@
         </p:nvSpPr>
         <p:spPr>
           <a:xfrm>
-            <a:off x="800000" y="2015000"/>
-            <a:ext cx="460000" cy="460000"/>
+            <a:off x="780000" y="1951520"/>
+            <a:ext cx="420000" cy="420000"/>
           </a:xfrm>
           <a:prstGeom prst="ellipse">
             <a:avLst/>
@@ -22808,7 +22888,7 @@
           <a:p>
             <a:pPr algn="ctr"/>
             <a:r>
-              <a:rPr sz="1600" b="1">
+              <a:rPr sz="1400" b="1">
                 <a:solidFill>
                   <a:srgbClr val="FFFFFF"/>
                 </a:solidFill>
@@ -22827,8 +22907,8 @@
         </p:nvSpPr>
         <p:spPr>
           <a:xfrm>
-            <a:off x="1450000" y="1620000"/>
-            <a:ext cx="10050000" cy="1250000"/>
+            <a:off x="1380000" y="1449780"/>
+            <a:ext cx="10150000" cy="1423480"/>
           </a:xfrm>
           <a:prstGeom prst="rect">
             <a:avLst/>
@@ -22836,22 +22916,37 @@
           <a:noFill/>
         </p:spPr>
         <p:txBody>
-          <a:bodyPr wrap="square" anchor="ctr" lIns="50800" rIns="50800">
+          <a:bodyPr wrap="square" anchor="ctr">
             <a:spAutoFit/>
           </a:bodyPr>
           <a:lstStyle/>
           <a:p>
-            <a:pPr algn="l"/>
             <a:r>
-              <a:rPr sz="1600" b="0">
+              <a:rPr sz="1500" b="1">
                 <a:solidFill>
-                  <a:srgbClr val="1B2430"/>
+                  <a:srgbClr val="1F3A5F"/>
                 </a:solidFill>
                 <a:latin typeface="Calibri"/>
               </a:rPr>
               <a:t>Model reestri (Model Registry) — o'qitilgan modellarning markazlashgan, versiyalangan ombori bo'lib, har model uchun uning kelib chiqishini (lineage: qaysi kod commit'i, qaysi ma'lumot versiyasi, qaysi giperparametrlar, qaysi muhit), baholash…</a:t>
             </a:r>
           </a:p>
+          <a:p>
+            <a:pPr>
+              <a:spcBef>
+                <a:spcPts val="400"/>
+              </a:spcBef>
+            </a:pPr>
+            <a:r>
+              <a:rPr sz="1400">
+                <a:solidFill>
+                  <a:srgbClr val="334055"/>
+                </a:solidFill>
+                <a:latin typeface="Calibri"/>
+              </a:rPr>
+              <a:t>U ikki savolga javob beradi: «Hozir ishlab chiqarishda qaysi model ishlayapti va u qayerdan kelgan?» va «Bu modelni kim, qachon, qanday asosda tasdiqlagan?».</a:t>
+            </a:r>
+          </a:p>
         </p:txBody>
       </p:sp>
       <p:sp>
@@ -22862,12 +22957,12 @@
         </p:nvSpPr>
         <p:spPr>
           <a:xfrm>
-            <a:off x="550000" y="2990000"/>
-            <a:ext cx="11100000" cy="1250000"/>
+            <a:off x="550000" y="3023260"/>
+            <a:ext cx="11100000" cy="1503480"/>
           </a:xfrm>
           <a:prstGeom prst="roundRect">
             <a:avLst>
-              <a:gd name="adj" fmla="val 18000"/>
+              <a:gd name="adj" fmla="val 8000"/>
             </a:avLst>
           </a:prstGeom>
           <a:solidFill>
@@ -22908,8 +23003,8 @@
         </p:nvSpPr>
         <p:spPr>
           <a:xfrm>
-            <a:off x="550000" y="2990000"/>
-            <a:ext cx="70000" cy="1250000"/>
+            <a:off x="550000" y="3023260"/>
+            <a:ext cx="70000" cy="1503480"/>
           </a:xfrm>
           <a:prstGeom prst="rect">
             <a:avLst/>
@@ -22952,8 +23047,8 @@
         </p:nvSpPr>
         <p:spPr>
           <a:xfrm>
-            <a:off x="800000" y="3385000"/>
-            <a:ext cx="460000" cy="460000"/>
+            <a:off x="780000" y="3565000"/>
+            <a:ext cx="420000" cy="420000"/>
           </a:xfrm>
           <a:prstGeom prst="ellipse">
             <a:avLst/>
@@ -22986,7 +23081,7 @@
           <a:p>
             <a:pPr algn="ctr"/>
             <a:r>
-              <a:rPr sz="1600" b="1">
+              <a:rPr sz="1400" b="1">
                 <a:solidFill>
                   <a:srgbClr val="FFFFFF"/>
                 </a:solidFill>
@@ -23005,8 +23100,8 @@
         </p:nvSpPr>
         <p:spPr>
           <a:xfrm>
-            <a:off x="1450000" y="2990000"/>
-            <a:ext cx="10050000" cy="1250000"/>
+            <a:off x="1380000" y="3063260"/>
+            <a:ext cx="10150000" cy="1423480"/>
           </a:xfrm>
           <a:prstGeom prst="rect">
             <a:avLst/>
@@ -23014,20 +23109,35 @@
           <a:noFill/>
         </p:spPr>
         <p:txBody>
-          <a:bodyPr wrap="square" anchor="ctr" lIns="50800" rIns="50800">
+          <a:bodyPr wrap="square" anchor="ctr">
             <a:spAutoFit/>
           </a:bodyPr>
           <a:lstStyle/>
           <a:p>
-            <a:pPr algn="l"/>
             <a:r>
-              <a:rPr sz="1600" b="0">
+              <a:rPr sz="1500" b="1">
                 <a:solidFill>
-                  <a:srgbClr val="1B2430"/>
+                  <a:srgbClr val="1F3A5F"/>
                 </a:solidFill>
                 <a:latin typeface="Calibri"/>
               </a:rPr>
-              <a:t>MLflow — eng keng tarqalgan ochiq vosita; u to'rt komponentdan iborat. Tracking — har o'qitish ishga tushirilishi (run) uchun parametrlar, metrikalar (vaqt bo'yicha), artefaktlar va teglar yoziladi, veb-interfeysda solishtiriladi.</a:t>
+              <a:t>MLflow — eng keng tarqalgan ochiq vosita; u to'rt komponentdan iborat.</a:t>
+            </a:r>
+          </a:p>
+          <a:p>
+            <a:pPr>
+              <a:spcBef>
+                <a:spcPts val="400"/>
+              </a:spcBef>
+            </a:pPr>
+            <a:r>
+              <a:rPr sz="1400">
+                <a:solidFill>
+                  <a:srgbClr val="334055"/>
+                </a:solidFill>
+                <a:latin typeface="Calibri"/>
+              </a:rPr>
+              <a:t>Tracking — har o'qitish ishga tushirilishi (run) uchun parametrlar, metrikalar (vaqt bo'yicha), artefaktlar va teglar yoziladi, veb-interfeysda solishtiriladi.</a:t>
             </a:r>
           </a:p>
         </p:txBody>
@@ -23040,12 +23150,12 @@
         </p:nvSpPr>
         <p:spPr>
           <a:xfrm>
-            <a:off x="550000" y="4360000"/>
-            <a:ext cx="11100000" cy="1250000"/>
+            <a:off x="550000" y="4636740"/>
+            <a:ext cx="11100000" cy="1503480"/>
           </a:xfrm>
           <a:prstGeom prst="roundRect">
             <a:avLst>
-              <a:gd name="adj" fmla="val 18000"/>
+              <a:gd name="adj" fmla="val 8000"/>
             </a:avLst>
           </a:prstGeom>
           <a:solidFill>
@@ -23086,8 +23196,8 @@
         </p:nvSpPr>
         <p:spPr>
           <a:xfrm>
-            <a:off x="550000" y="4360000"/>
-            <a:ext cx="70000" cy="1250000"/>
+            <a:off x="550000" y="4636740"/>
+            <a:ext cx="70000" cy="1503480"/>
           </a:xfrm>
           <a:prstGeom prst="rect">
             <a:avLst/>
@@ -23130,8 +23240,8 @@
         </p:nvSpPr>
         <p:spPr>
           <a:xfrm>
-            <a:off x="800000" y="4755000"/>
-            <a:ext cx="460000" cy="460000"/>
+            <a:off x="780000" y="5178480"/>
+            <a:ext cx="420000" cy="420000"/>
           </a:xfrm>
           <a:prstGeom prst="ellipse">
             <a:avLst/>
@@ -23164,7 +23274,7 @@
           <a:p>
             <a:pPr algn="ctr"/>
             <a:r>
-              <a:rPr sz="1600" b="1">
+              <a:rPr sz="1400" b="1">
                 <a:solidFill>
                   <a:srgbClr val="FFFFFF"/>
                 </a:solidFill>
@@ -23183,8 +23293,8 @@
         </p:nvSpPr>
         <p:spPr>
           <a:xfrm>
-            <a:off x="1450000" y="4360000"/>
-            <a:ext cx="10050000" cy="1250000"/>
+            <a:off x="1380000" y="4676740"/>
+            <a:ext cx="10150000" cy="1423480"/>
           </a:xfrm>
           <a:prstGeom prst="rect">
             <a:avLst/>
@@ -23192,20 +23302,19 @@
           <a:noFill/>
         </p:spPr>
         <p:txBody>
-          <a:bodyPr wrap="square" anchor="ctr" lIns="50800" rIns="50800">
+          <a:bodyPr wrap="square" anchor="ctr">
             <a:spAutoFit/>
           </a:bodyPr>
           <a:lstStyle/>
           <a:p>
-            <a:pPr algn="l"/>
             <a:r>
-              <a:rPr sz="1600" b="0">
+              <a:rPr sz="1400" b="0">
                 <a:solidFill>
                   <a:srgbClr val="1B2430"/>
                 </a:solidFill>
                 <a:latin typeface="Calibri"/>
               </a:rPr>
-              <a:t>Model reestriga «model kartasi» (model card) ham biriktiriladi — modelning maqsadi, o'qitish ma'lumotlari, baholash natijalari (jumladan, kichik guruhlar bo'yicha), cheklovlari va etik…</a:t>
+              <a:t>Model reestriga «model kartasi» (model card) ham biriktiriladi — modelning maqsadi, o'qitish ma'lumotlari, baholash natijalari (jumladan, kichik guruhlar bo'yicha), cheklovlari va etik mulohazalari haqida hujjat; ISO/IEC 42001 va EU AI Act kabi me'yoriy…</a:t>
             </a:r>
           </a:p>
         </p:txBody>
@@ -25656,8 +25765,8 @@
         </p:nvSpPr>
         <p:spPr>
           <a:xfrm>
-            <a:off x="550000" y="2076666"/>
-            <a:ext cx="11100000" cy="1250000"/>
+            <a:off x="550000" y="3200000"/>
+            <a:ext cx="11100000" cy="520000"/>
           </a:xfrm>
           <a:prstGeom prst="roundRect">
             <a:avLst>
@@ -25702,8 +25811,8 @@
         </p:nvSpPr>
         <p:spPr>
           <a:xfrm>
-            <a:off x="550000" y="2076666"/>
-            <a:ext cx="70000" cy="1250000"/>
+            <a:off x="550000" y="3200000"/>
+            <a:ext cx="70000" cy="520000"/>
           </a:xfrm>
           <a:prstGeom prst="rect">
             <a:avLst/>
@@ -25746,8 +25855,8 @@
         </p:nvSpPr>
         <p:spPr>
           <a:xfrm>
-            <a:off x="800000" y="2471666"/>
-            <a:ext cx="460000" cy="460000"/>
+            <a:off x="780000" y="3270000"/>
+            <a:ext cx="380000" cy="380000"/>
           </a:xfrm>
           <a:prstGeom prst="ellipse">
             <a:avLst/>
@@ -25780,7 +25889,7 @@
           <a:p>
             <a:pPr algn="ctr"/>
             <a:r>
-              <a:rPr sz="1600" b="1">
+              <a:rPr sz="1400" b="1">
                 <a:solidFill>
                   <a:srgbClr val="FFFFFF"/>
                 </a:solidFill>
@@ -25799,8 +25908,8 @@
         </p:nvSpPr>
         <p:spPr>
           <a:xfrm>
-            <a:off x="1450000" y="2076666"/>
-            <a:ext cx="10050000" cy="1250000"/>
+            <a:off x="1380000" y="3240000"/>
+            <a:ext cx="10150000" cy="440000"/>
           </a:xfrm>
           <a:prstGeom prst="rect">
             <a:avLst/>
@@ -25808,12 +25917,11 @@
           <a:noFill/>
         </p:spPr>
         <p:txBody>
-          <a:bodyPr wrap="square" anchor="ctr" lIns="50800" rIns="50800">
+          <a:bodyPr wrap="square" anchor="ctr">
             <a:spAutoFit/>
           </a:bodyPr>
           <a:lstStyle/>
           <a:p>
-            <a:pPr algn="l"/>
             <a:r>
               <a:rPr sz="1600" b="0">
                 <a:solidFill>
@@ -25821,7 +25929,7 @@
                 </a:solidFill>
                 <a:latin typeface="Calibri"/>
               </a:rPr>
-              <a:t>ML loyihasida uzluksiz integratsiya kod testlaridan ancha keng. Breck va hamkasblarining «ML Test Score» (Google, 2017) ro'yxati to'rt guruhni ajratadi: ma'lumot testlari (xususiyat taqsimoti kutilganga mos, sxema buzilmagan, maxfiy xususiyatlar yo'q,…</a:t>
+              <a:t>ML loyihasida uzluksiz integratsiya kod testlaridan ancha keng.</a:t>
             </a:r>
           </a:p>
         </p:txBody>
@@ -25834,8 +25942,8 @@
         </p:nvSpPr>
         <p:spPr>
           <a:xfrm>
-            <a:off x="550000" y="3446666"/>
-            <a:ext cx="11100000" cy="1250000"/>
+            <a:off x="550000" y="3830000"/>
+            <a:ext cx="11100000" cy="520000"/>
           </a:xfrm>
           <a:prstGeom prst="roundRect">
             <a:avLst>
@@ -25880,8 +25988,8 @@
         </p:nvSpPr>
         <p:spPr>
           <a:xfrm>
-            <a:off x="550000" y="3446666"/>
-            <a:ext cx="70000" cy="1250000"/>
+            <a:off x="550000" y="3830000"/>
+            <a:ext cx="70000" cy="520000"/>
           </a:xfrm>
           <a:prstGeom prst="rect">
             <a:avLst/>
@@ -25924,8 +26032,8 @@
         </p:nvSpPr>
         <p:spPr>
           <a:xfrm>
-            <a:off x="800000" y="3841666"/>
-            <a:ext cx="460000" cy="460000"/>
+            <a:off x="780000" y="3900000"/>
+            <a:ext cx="380000" cy="380000"/>
           </a:xfrm>
           <a:prstGeom prst="ellipse">
             <a:avLst/>
@@ -25958,7 +26066,7 @@
           <a:p>
             <a:pPr algn="ctr"/>
             <a:r>
-              <a:rPr sz="1600" b="1">
+              <a:rPr sz="1400" b="1">
                 <a:solidFill>
                   <a:srgbClr val="FFFFFF"/>
                 </a:solidFill>
@@ -25977,8 +26085,8 @@
         </p:nvSpPr>
         <p:spPr>
           <a:xfrm>
-            <a:off x="1450000" y="3446666"/>
-            <a:ext cx="10050000" cy="1250000"/>
+            <a:off x="1380000" y="3870000"/>
+            <a:ext cx="10150000" cy="440000"/>
           </a:xfrm>
           <a:prstGeom prst="rect">
             <a:avLst/>
@@ -25986,12 +26094,11 @@
           <a:noFill/>
         </p:spPr>
         <p:txBody>
-          <a:bodyPr wrap="square" anchor="ctr" lIns="50800" rIns="50800">
+          <a:bodyPr wrap="square" anchor="ctr">
             <a:spAutoFit/>
           </a:bodyPr>
           <a:lstStyle/>
           <a:p>
-            <a:pPr algn="l"/>
             <a:r>
               <a:rPr sz="1600" b="0">
                 <a:solidFill>
@@ -25999,7 +26106,7 @@
                 </a:solidFill>
                 <a:latin typeface="Calibri"/>
               </a:rPr>
-              <a:t>Uzluksiz yetkazish ML'da «model validatsiyasi darvozasi» bilan to'ldiriladi: yangi model avtomatik ravishda ishlab chiqarishga chiqmaydi, u oldin joriy «chempion» bilan bir xil test to'plamida solishtiriladi, kichik guruhlar bo'yicha sifati tekshiriladi,…</a:t>
+              <a:t>Uzluksiz yetkazish ML'da «model validatsiyasi darvozasi» bilan to'ldiriladi: yangi model avtomatik ravishda ishlab chiqarishga chiqmaydi, u oldin joriy «chempion» bilan bir xil test to'plamida solishtiriladi, kichik guruhlar bo'yicha sifati tekshiriladi…</a:t>
             </a:r>
           </a:p>
         </p:txBody>
